--- a/media/resources/files/ButunSandardyJanaOnduktardyKoboytuuBoluu-10-100-1000-TarsiaKurak.pptx
+++ b/media/resources/files/ButunSandardyJanaOnduktardyKoboytuuBoluu-10-100-1000-TarsiaKurak.pptx
@@ -10659,7 +10659,7 @@
             </a:pPr>
             <a:r>
               <a:rPr lang="ru-RU" sz="2800" dirty="0"/>
-              <a:t>Турдуу пикирлер учун ыраазычылык билдиребиз.</a:t>
+              <a:t>Түрдүү пикирлер үчүн ыраазычылык билдиребиз.</a:t>
             </a:r>
           </a:p>
           <a:p>

--- a/media/resources/files/ButunSandardyJanaOnduktardyKoboytuuBoluu-10-100-1000-TarsiaKurak.pptx
+++ b/media/resources/files/ButunSandardyJanaOnduktardyKoboytuuBoluu-10-100-1000-TarsiaKurak.pptx
@@ -7592,7 +7592,7 @@
                 <a:ea typeface="+mn-ea"/>
                 <a:cs typeface="Arial" panose="020B0604020202020204" pitchFamily="34" charset="0"/>
               </a:rPr>
-              <a:t>Окуучуларга  тарсиа курактын туура болгондон кийин гана, клей менен жабыштырууну сунуштоо керек</a:t>
+              <a:t>Окуучулар куракты туура чогулткандан кийин гана клей менен чапташсын.</a:t>
             </a:r>
           </a:p>
           <a:p>
@@ -7661,7 +7661,7 @@
                 <a:ea typeface="+mn-ea"/>
                 <a:cs typeface="Arial" panose="020B0604020202020204" pitchFamily="34" charset="0"/>
               </a:rPr>
-              <a:t>үч бурчтуктарды кесип алуунун ордуна , окуучулар жөн гана тамгаларды  колдонуу менен суроолор менен жоопторду дал келтирип чыгышса болот, (кайсы жана клей жок болгон учурда)</a:t>
+              <a:t>үч бурчтуктарды кесип алуунун ордуна, окуучулар жөн гана тамгаларды  колдонуу менен суроолор менен жоопторду дал келтирип чыгышса болот, (кайчы жана клей жок болгон учурда)</a:t>
             </a:r>
           </a:p>
           <a:p>
@@ -9735,7 +9735,7 @@
                 <a:latin typeface="Verdana" panose="020B0604030504040204" pitchFamily="34" charset="0"/>
                 <a:ea typeface="Verdana" panose="020B0604030504040204" pitchFamily="34" charset="0"/>
               </a:rPr>
-              <a:t> Ар бир  үч бурчтуктун четиндеги суроо туура жоопко  дал келгидей , бири-бирине карама-каршы тургандай үч бурчтук түзүңүз</a:t>
+              <a:t> Ар бир  үч бурчтуктун четиндеги суроо туура жоопко  дал келгидей, бири-бирине карама-каршы тургандай үч бурчтук түзүңүз</a:t>
             </a:r>
             <a:endParaRPr lang="en-US" sz="1463" b="1" dirty="0">
               <a:latin typeface="Verdana" panose="020B0604030504040204" pitchFamily="34" charset="0"/>
